--- a/e2e/pptx/fixtures/text-warp-fidelity.pptx
+++ b/e2e/pptx/fixtures/text-warp-fidelity.pptx
@@ -344,7 +344,7 @@
         </p:spPr>
         <p:txBody>
           <a:bodyPr wrap="none">
-            <a:prstTxWarp prst="textPlain">
+            <a:prstTxWarp prst="textNoShape">
               <a:avLst/>
             </a:prstTxWarp>
           </a:bodyPr>
@@ -447,6 +447,43 @@
                 <a:latin typeface="PptxE2EWideGlyphNoOutlineMatch"/>
               </a:rPr>
               <a:t>MOM</a:t>
+            </a:r>
+          </a:p>
+        </p:txBody>
+      </p:sp>
+      <p:sp>
+        <p:nvSpPr>
+          <p:cNvPr id="12" name="plain"/>
+          <p:cNvSpPr txBox="1"/>
+          <p:nvPr/>
+        </p:nvSpPr>
+        <p:spPr>
+          <a:xfrm>
+            <a:off x="3302000" y="3810000"/>
+            <a:ext cx="508000" cy="508000"/>
+          </a:xfrm>
+          <a:prstGeom prst="rect">
+            <a:avLst/>
+          </a:prstGeom>
+          <a:noFill/>
+        </p:spPr>
+        <p:txBody>
+          <a:bodyPr wrap="none">
+            <a:prstTxWarp prst="textPlain">
+              <a:avLst/>
+            </a:prstTxWarp>
+          </a:bodyPr>
+          <a:lstStyle/>
+          <a:p>
+            <a:pPr algn="ctr"/>
+            <a:r>
+              <a:rPr lang="en-US" sz="1400" b="1">
+                <a:solidFill>
+                  <a:srgbClr val="2E75B6"/>
+                </a:solidFill>
+                <a:latin typeface="Arial"/>
+              </a:rPr>
+              <a:t>schedule</a:t>
             </a:r>
           </a:p>
         </p:txBody>

--- a/e2e/pptx/fixtures/text-warp-fidelity.pptx
+++ b/e2e/pptx/fixtures/text-warp-fidelity.pptx
@@ -484,6 +484,43 @@
                 <a:latin typeface="Arial"/>
               </a:rPr>
               <a:t>schedule</a:t>
+            </a:r>
+          </a:p>
+        </p:txBody>
+      </p:sp>
+      <p:sp>
+        <p:nvSpPr>
+          <p:cNvPr id="13" name="plain-paragraph"/>
+          <p:cNvSpPr txBox="1"/>
+          <p:nvPr/>
+        </p:nvSpPr>
+        <p:spPr>
+          <a:xfrm>
+            <a:off x="4064000" y="3810000"/>
+            <a:ext cx="2159000" cy="1016000"/>
+          </a:xfrm>
+          <a:prstGeom prst="rect">
+            <a:avLst/>
+          </a:prstGeom>
+          <a:noFill/>
+        </p:spPr>
+        <p:txBody>
+          <a:bodyPr wrap="square">
+            <a:prstTxWarp prst="textPlain">
+              <a:avLst/>
+            </a:prstTxWarp>
+          </a:bodyPr>
+          <a:lstStyle/>
+          <a:p>
+            <a:pPr algn="ctr"/>
+            <a:r>
+              <a:rPr lang="en-US" sz="1200" b="1">
+                <a:solidFill>
+                  <a:srgbClr val="2E75B6"/>
+                </a:solidFill>
+                <a:latin typeface="Arial"/>
+              </a:rPr>
+              <a:t>Plain stretches the wrapped block of text to fill the whole shape</a:t>
             </a:r>
           </a:p>
         </p:txBody>

--- a/e2e/pptx/fixtures/text-warp-fidelity.pptx
+++ b/e2e/pptx/fixtures/text-warp-fidelity.pptx
@@ -344,7 +344,7 @@
         </p:spPr>
         <p:txBody>
           <a:bodyPr wrap="none">
-            <a:prstTxWarp prst="textPlain">
+            <a:prstTxWarp prst="textNoShape">
               <a:avLst/>
             </a:prstTxWarp>
           </a:bodyPr>
@@ -447,6 +447,80 @@
                 <a:latin typeface="PptxE2EWideGlyphNoOutlineMatch"/>
               </a:rPr>
               <a:t>MOM</a:t>
+            </a:r>
+          </a:p>
+        </p:txBody>
+      </p:sp>
+      <p:sp>
+        <p:nvSpPr>
+          <p:cNvPr id="12" name="plain"/>
+          <p:cNvSpPr txBox="1"/>
+          <p:nvPr/>
+        </p:nvSpPr>
+        <p:spPr>
+          <a:xfrm>
+            <a:off x="3302000" y="3810000"/>
+            <a:ext cx="508000" cy="508000"/>
+          </a:xfrm>
+          <a:prstGeom prst="rect">
+            <a:avLst/>
+          </a:prstGeom>
+          <a:noFill/>
+        </p:spPr>
+        <p:txBody>
+          <a:bodyPr wrap="none">
+            <a:prstTxWarp prst="textPlain">
+              <a:avLst/>
+            </a:prstTxWarp>
+          </a:bodyPr>
+          <a:lstStyle/>
+          <a:p>
+            <a:pPr algn="ctr"/>
+            <a:r>
+              <a:rPr lang="en-US" sz="1400" b="1">
+                <a:solidFill>
+                  <a:srgbClr val="2E75B6"/>
+                </a:solidFill>
+                <a:latin typeface="Arial"/>
+              </a:rPr>
+              <a:t>schedule</a:t>
+            </a:r>
+          </a:p>
+        </p:txBody>
+      </p:sp>
+      <p:sp>
+        <p:nvSpPr>
+          <p:cNvPr id="13" name="plain-paragraph"/>
+          <p:cNvSpPr txBox="1"/>
+          <p:nvPr/>
+        </p:nvSpPr>
+        <p:spPr>
+          <a:xfrm>
+            <a:off x="4064000" y="3810000"/>
+            <a:ext cx="2159000" cy="1016000"/>
+          </a:xfrm>
+          <a:prstGeom prst="rect">
+            <a:avLst/>
+          </a:prstGeom>
+          <a:noFill/>
+        </p:spPr>
+        <p:txBody>
+          <a:bodyPr wrap="square">
+            <a:prstTxWarp prst="textPlain">
+              <a:avLst/>
+            </a:prstTxWarp>
+          </a:bodyPr>
+          <a:lstStyle/>
+          <a:p>
+            <a:pPr algn="ctr"/>
+            <a:r>
+              <a:rPr lang="en-US" sz="1200" b="1">
+                <a:solidFill>
+                  <a:srgbClr val="2E75B6"/>
+                </a:solidFill>
+                <a:latin typeface="Arial"/>
+              </a:rPr>
+              <a:t>Plain stretches the wrapped block of text to fill the whole shape</a:t>
             </a:r>
           </a:p>
         </p:txBody>
